--- a/outputs/History_AI_Research_Report_EN.pptx
+++ b/outputs/History_AI_Research_Report_EN.pptx
@@ -25,6 +25,7 @@
     <p:sldId id="273" r:id="rId24"/>
     <p:sldId id="274" r:id="rId25"/>
     <p:sldId id="275" r:id="rId26"/>
+    <p:sldId id="276" r:id="rId27"/>
   </p:sldIdLst>
   <p:sldSz cx="12191695" cy="6858000" type="screen4x3"/>
   <p:notesSz cx="6858000" cy="9144000"/>
@@ -12742,7 +12743,7 @@
         <p:spPr>
           <a:xfrm>
             <a:off x="0" y="0"/>
-            <a:ext cx="12191695" cy="6858000"/>
+            <a:ext cx="128016" cy="6858000"/>
           </a:xfrm>
           <a:prstGeom prst="rect">
             <a:avLst/>
@@ -12779,14 +12780,94 @@
       </p:sp>
       <p:sp>
         <p:nvSpPr>
-          <p:cNvPr id="3" name="Rectangle 2"/>
+          <p:cNvPr id="3" name="TextBox 2"/>
+          <p:cNvSpPr txBox="1"/>
+          <p:nvPr/>
+        </p:nvSpPr>
+        <p:spPr>
+          <a:xfrm>
+            <a:off x="777240" y="502920"/>
+            <a:ext cx="10058400" cy="256032"/>
+          </a:xfrm>
+          <a:prstGeom prst="rect">
+            <a:avLst/>
+          </a:prstGeom>
+          <a:noFill/>
+        </p:spPr>
+        <p:txBody>
+          <a:bodyPr wrap="square" anchor="t" lIns="0" rIns="0" tIns="0" bIns="0">
+            <a:spAutoFit/>
+          </a:bodyPr>
+          <a:lstStyle/>
+          <a:p>
+            <a:pPr algn="l">
+              <a:lnSpc>
+                <a:spcPct val="115000"/>
+              </a:lnSpc>
+            </a:pPr>
+            <a:r>
+              <a:rPr sz="1050" b="1" i="0">
+                <a:solidFill>
+                  <a:srgbClr val="3A6EA5"/>
+                </a:solidFill>
+                <a:latin typeface="Arial"/>
+                <a:ea typeface="Arial"/>
+              </a:rPr>
+              <a:t>AI IN EDUCATION · RESEARCH REPORT</a:t>
+            </a:r>
+          </a:p>
+        </p:txBody>
+      </p:sp>
+      <p:sp>
+        <p:nvSpPr>
+          <p:cNvPr id="4" name="TextBox 3"/>
+          <p:cNvSpPr txBox="1"/>
+          <p:nvPr/>
+        </p:nvSpPr>
+        <p:spPr>
+          <a:xfrm>
+            <a:off x="777240" y="822960"/>
+            <a:ext cx="10607040" cy="822960"/>
+          </a:xfrm>
+          <a:prstGeom prst="rect">
+            <a:avLst/>
+          </a:prstGeom>
+          <a:noFill/>
+        </p:spPr>
+        <p:txBody>
+          <a:bodyPr wrap="square" anchor="t" lIns="0" rIns="0" tIns="0" bIns="0">
+            <a:spAutoFit/>
+          </a:bodyPr>
+          <a:lstStyle/>
+          <a:p>
+            <a:pPr algn="l">
+              <a:lnSpc>
+                <a:spcPct val="95000"/>
+              </a:lnSpc>
+            </a:pPr>
+            <a:r>
+              <a:rPr sz="2900" b="1" i="0">
+                <a:solidFill>
+                  <a:srgbClr val="1F2A44"/>
+                </a:solidFill>
+                <a:latin typeface="Arial"/>
+                <a:ea typeface="Arial"/>
+              </a:rPr>
+              <a:t>References and data sources</a:t>
+            </a:r>
+          </a:p>
+        </p:txBody>
+      </p:sp>
+      <p:sp>
+        <p:nvSpPr>
+          <p:cNvPr id="5" name="Rectangle 4"/>
           <p:cNvSpPr/>
           <p:nvPr/>
         </p:nvSpPr>
         <p:spPr>
           <a:xfrm>
-            <a:off x="0" y="0"/>
-            <a:ext cx="182880" cy="6858000"/>
+            <a:off x="777240" y="1664208"/>
+            <a:ext cx="868680" cy="36576"/>
           </a:xfrm>
           <a:prstGeom prst="rect">
             <a:avLst/>
@@ -12823,6 +12904,752 @@
       </p:sp>
       <p:sp>
         <p:nvSpPr>
+          <p:cNvPr id="6" name="TextBox 5"/>
+          <p:cNvSpPr txBox="1"/>
+          <p:nvPr/>
+        </p:nvSpPr>
+        <p:spPr>
+          <a:xfrm>
+            <a:off x="10591495" y="6400800"/>
+            <a:ext cx="822960" cy="274320"/>
+          </a:xfrm>
+          <a:prstGeom prst="rect">
+            <a:avLst/>
+          </a:prstGeom>
+          <a:noFill/>
+        </p:spPr>
+        <p:txBody>
+          <a:bodyPr wrap="square" anchor="t" lIns="0" rIns="0" tIns="0" bIns="0">
+            <a:spAutoFit/>
+          </a:bodyPr>
+          <a:lstStyle/>
+          <a:p>
+            <a:pPr algn="r">
+              <a:lnSpc>
+                <a:spcPct val="115000"/>
+              </a:lnSpc>
+            </a:pPr>
+            <a:r>
+              <a:rPr sz="1000" b="0" i="0">
+                <a:solidFill>
+                  <a:srgbClr val="6B7686"/>
+                </a:solidFill>
+                <a:latin typeface="Arial"/>
+                <a:ea typeface="Arial"/>
+              </a:rPr>
+              <a:t>20</a:t>
+            </a:r>
+          </a:p>
+        </p:txBody>
+      </p:sp>
+      <p:sp>
+        <p:nvSpPr>
+          <p:cNvPr id="7" name="TextBox 6"/>
+          <p:cNvSpPr txBox="1"/>
+          <p:nvPr/>
+        </p:nvSpPr>
+        <p:spPr>
+          <a:xfrm>
+            <a:off x="777240" y="1965960"/>
+            <a:ext cx="457200" cy="274320"/>
+          </a:xfrm>
+          <a:prstGeom prst="rect">
+            <a:avLst/>
+          </a:prstGeom>
+          <a:noFill/>
+        </p:spPr>
+        <p:txBody>
+          <a:bodyPr wrap="square" anchor="t" lIns="0" rIns="0" tIns="0" bIns="0">
+            <a:spAutoFit/>
+          </a:bodyPr>
+          <a:lstStyle/>
+          <a:p>
+            <a:pPr algn="l">
+              <a:lnSpc>
+                <a:spcPct val="115000"/>
+              </a:lnSpc>
+            </a:pPr>
+            <a:r>
+              <a:rPr sz="1050" b="1" i="0">
+                <a:solidFill>
+                  <a:srgbClr val="3A6EA5"/>
+                </a:solidFill>
+                <a:latin typeface="Arial"/>
+                <a:ea typeface="Arial"/>
+              </a:rPr>
+              <a:t>[1]</a:t>
+            </a:r>
+          </a:p>
+        </p:txBody>
+      </p:sp>
+      <p:sp>
+        <p:nvSpPr>
+          <p:cNvPr id="8" name="TextBox 7"/>
+          <p:cNvSpPr txBox="1"/>
+          <p:nvPr/>
+        </p:nvSpPr>
+        <p:spPr>
+          <a:xfrm>
+            <a:off x="1234440" y="1965960"/>
+            <a:ext cx="10058400" cy="566928"/>
+          </a:xfrm>
+          <a:prstGeom prst="rect">
+            <a:avLst/>
+          </a:prstGeom>
+          <a:noFill/>
+        </p:spPr>
+        <p:txBody>
+          <a:bodyPr wrap="square" anchor="t" lIns="0" rIns="0" tIns="0" bIns="0">
+            <a:spAutoFit/>
+          </a:bodyPr>
+          <a:lstStyle/>
+          <a:p>
+            <a:pPr algn="l">
+              <a:lnSpc>
+                <a:spcPct val="135000"/>
+              </a:lnSpc>
+            </a:pPr>
+            <a:r>
+              <a:rPr sz="1050" b="0" i="0">
+                <a:solidFill>
+                  <a:srgbClr val="1B2430"/>
+                </a:solidFill>
+                <a:latin typeface="Arial"/>
+                <a:ea typeface="Arial"/>
+              </a:rPr>
+              <a:t>RAND Corporation (2026-03-17). More Students Use AI for Homework and Believe It Harms Their Learning. n = 1,214, ages 12–29. rand.org</a:t>
+            </a:r>
+          </a:p>
+        </p:txBody>
+      </p:sp>
+      <p:sp>
+        <p:nvSpPr>
+          <p:cNvPr id="9" name="TextBox 8"/>
+          <p:cNvSpPr txBox="1"/>
+          <p:nvPr/>
+        </p:nvSpPr>
+        <p:spPr>
+          <a:xfrm>
+            <a:off x="777240" y="2587752"/>
+            <a:ext cx="457200" cy="274320"/>
+          </a:xfrm>
+          <a:prstGeom prst="rect">
+            <a:avLst/>
+          </a:prstGeom>
+          <a:noFill/>
+        </p:spPr>
+        <p:txBody>
+          <a:bodyPr wrap="square" anchor="t" lIns="0" rIns="0" tIns="0" bIns="0">
+            <a:spAutoFit/>
+          </a:bodyPr>
+          <a:lstStyle/>
+          <a:p>
+            <a:pPr algn="l">
+              <a:lnSpc>
+                <a:spcPct val="115000"/>
+              </a:lnSpc>
+            </a:pPr>
+            <a:r>
+              <a:rPr sz="1050" b="1" i="0">
+                <a:solidFill>
+                  <a:srgbClr val="3A6EA5"/>
+                </a:solidFill>
+                <a:latin typeface="Arial"/>
+                <a:ea typeface="Arial"/>
+              </a:rPr>
+              <a:t>[2]</a:t>
+            </a:r>
+          </a:p>
+        </p:txBody>
+      </p:sp>
+      <p:sp>
+        <p:nvSpPr>
+          <p:cNvPr id="10" name="TextBox 9"/>
+          <p:cNvSpPr txBox="1"/>
+          <p:nvPr/>
+        </p:nvSpPr>
+        <p:spPr>
+          <a:xfrm>
+            <a:off x="1234440" y="2587752"/>
+            <a:ext cx="10058400" cy="566928"/>
+          </a:xfrm>
+          <a:prstGeom prst="rect">
+            <a:avLst/>
+          </a:prstGeom>
+          <a:noFill/>
+        </p:spPr>
+        <p:txBody>
+          <a:bodyPr wrap="square" anchor="t" lIns="0" rIns="0" tIns="0" bIns="0">
+            <a:spAutoFit/>
+          </a:bodyPr>
+          <a:lstStyle/>
+          <a:p>
+            <a:pPr algn="l">
+              <a:lnSpc>
+                <a:spcPct val="135000"/>
+              </a:lnSpc>
+            </a:pPr>
+            <a:r>
+              <a:rPr sz="1050" b="0" i="0">
+                <a:solidFill>
+                  <a:srgbClr val="1B2430"/>
+                </a:solidFill>
+                <a:latin typeface="Arial"/>
+                <a:ea typeface="Arial"/>
+              </a:rPr>
+              <a:t>HEPI (2025-02). Student Generative AI Survey 2025. 45% have used AI at school. hepi.ac.uk</a:t>
+            </a:r>
+          </a:p>
+        </p:txBody>
+      </p:sp>
+      <p:sp>
+        <p:nvSpPr>
+          <p:cNvPr id="11" name="TextBox 10"/>
+          <p:cNvSpPr txBox="1"/>
+          <p:nvPr/>
+        </p:nvSpPr>
+        <p:spPr>
+          <a:xfrm>
+            <a:off x="777240" y="3209544"/>
+            <a:ext cx="457200" cy="274320"/>
+          </a:xfrm>
+          <a:prstGeom prst="rect">
+            <a:avLst/>
+          </a:prstGeom>
+          <a:noFill/>
+        </p:spPr>
+        <p:txBody>
+          <a:bodyPr wrap="square" anchor="t" lIns="0" rIns="0" tIns="0" bIns="0">
+            <a:spAutoFit/>
+          </a:bodyPr>
+          <a:lstStyle/>
+          <a:p>
+            <a:pPr algn="l">
+              <a:lnSpc>
+                <a:spcPct val="115000"/>
+              </a:lnSpc>
+            </a:pPr>
+            <a:r>
+              <a:rPr sz="1050" b="1" i="0">
+                <a:solidFill>
+                  <a:srgbClr val="3A6EA5"/>
+                </a:solidFill>
+                <a:latin typeface="Arial"/>
+                <a:ea typeface="Arial"/>
+              </a:rPr>
+              <a:t>[3]</a:t>
+            </a:r>
+          </a:p>
+        </p:txBody>
+      </p:sp>
+      <p:sp>
+        <p:nvSpPr>
+          <p:cNvPr id="12" name="TextBox 11"/>
+          <p:cNvSpPr txBox="1"/>
+          <p:nvPr/>
+        </p:nvSpPr>
+        <p:spPr>
+          <a:xfrm>
+            <a:off x="1234440" y="3209544"/>
+            <a:ext cx="10058400" cy="566928"/>
+          </a:xfrm>
+          <a:prstGeom prst="rect">
+            <a:avLst/>
+          </a:prstGeom>
+          <a:noFill/>
+        </p:spPr>
+        <p:txBody>
+          <a:bodyPr wrap="square" anchor="t" lIns="0" rIns="0" tIns="0" bIns="0">
+            <a:spAutoFit/>
+          </a:bodyPr>
+          <a:lstStyle/>
+          <a:p>
+            <a:pPr algn="l">
+              <a:lnSpc>
+                <a:spcPct val="135000"/>
+              </a:lnSpc>
+            </a:pPr>
+            <a:r>
+              <a:rPr sz="1050" b="0" i="0">
+                <a:solidFill>
+                  <a:srgbClr val="1B2430"/>
+                </a:solidFill>
+                <a:latin typeface="Arial"/>
+                <a:ea typeface="Arial"/>
+              </a:rPr>
+              <a:t>Common Sense Media (2025). Teens' generative-AI use: 85% of AI-using teens use it for schoolwork. commonsensemedia.org</a:t>
+            </a:r>
+          </a:p>
+        </p:txBody>
+      </p:sp>
+      <p:sp>
+        <p:nvSpPr>
+          <p:cNvPr id="13" name="TextBox 12"/>
+          <p:cNvSpPr txBox="1"/>
+          <p:nvPr/>
+        </p:nvSpPr>
+        <p:spPr>
+          <a:xfrm>
+            <a:off x="777240" y="3831336"/>
+            <a:ext cx="457200" cy="274320"/>
+          </a:xfrm>
+          <a:prstGeom prst="rect">
+            <a:avLst/>
+          </a:prstGeom>
+          <a:noFill/>
+        </p:spPr>
+        <p:txBody>
+          <a:bodyPr wrap="square" anchor="t" lIns="0" rIns="0" tIns="0" bIns="0">
+            <a:spAutoFit/>
+          </a:bodyPr>
+          <a:lstStyle/>
+          <a:p>
+            <a:pPr algn="l">
+              <a:lnSpc>
+                <a:spcPct val="115000"/>
+              </a:lnSpc>
+            </a:pPr>
+            <a:r>
+              <a:rPr sz="1050" b="1" i="0">
+                <a:solidFill>
+                  <a:srgbClr val="3A6EA5"/>
+                </a:solidFill>
+                <a:latin typeface="Arial"/>
+                <a:ea typeface="Arial"/>
+              </a:rPr>
+              <a:t>[4]</a:t>
+            </a:r>
+          </a:p>
+        </p:txBody>
+      </p:sp>
+      <p:sp>
+        <p:nvSpPr>
+          <p:cNvPr id="14" name="TextBox 13"/>
+          <p:cNvSpPr txBox="1"/>
+          <p:nvPr/>
+        </p:nvSpPr>
+        <p:spPr>
+          <a:xfrm>
+            <a:off x="1234440" y="3831336"/>
+            <a:ext cx="10058400" cy="566928"/>
+          </a:xfrm>
+          <a:prstGeom prst="rect">
+            <a:avLst/>
+          </a:prstGeom>
+          <a:noFill/>
+        </p:spPr>
+        <p:txBody>
+          <a:bodyPr wrap="square" anchor="t" lIns="0" rIns="0" tIns="0" bIns="0">
+            <a:spAutoFit/>
+          </a:bodyPr>
+          <a:lstStyle/>
+          <a:p>
+            <a:pPr algn="l">
+              <a:lnSpc>
+                <a:spcPct val="135000"/>
+              </a:lnSpc>
+            </a:pPr>
+            <a:r>
+              <a:rPr sz="1050" b="0" i="0">
+                <a:solidFill>
+                  <a:srgbClr val="1B2430"/>
+                </a:solidFill>
+                <a:latin typeface="Arial"/>
+                <a:ea typeface="Arial"/>
+              </a:rPr>
+              <a:t>National Literacy Trust (2025-08). Young people and teachers' use of generative AI: 43.2% of teachers concerned (+7.5pp). literacytrust.org.uk</a:t>
+            </a:r>
+          </a:p>
+        </p:txBody>
+      </p:sp>
+      <p:sp>
+        <p:nvSpPr>
+          <p:cNvPr id="15" name="TextBox 14"/>
+          <p:cNvSpPr txBox="1"/>
+          <p:nvPr/>
+        </p:nvSpPr>
+        <p:spPr>
+          <a:xfrm>
+            <a:off x="777240" y="4453128"/>
+            <a:ext cx="457200" cy="274320"/>
+          </a:xfrm>
+          <a:prstGeom prst="rect">
+            <a:avLst/>
+          </a:prstGeom>
+          <a:noFill/>
+        </p:spPr>
+        <p:txBody>
+          <a:bodyPr wrap="square" anchor="t" lIns="0" rIns="0" tIns="0" bIns="0">
+            <a:spAutoFit/>
+          </a:bodyPr>
+          <a:lstStyle/>
+          <a:p>
+            <a:pPr algn="l">
+              <a:lnSpc>
+                <a:spcPct val="115000"/>
+              </a:lnSpc>
+            </a:pPr>
+            <a:r>
+              <a:rPr sz="1050" b="1" i="0">
+                <a:solidFill>
+                  <a:srgbClr val="3A6EA5"/>
+                </a:solidFill>
+                <a:latin typeface="Arial"/>
+                <a:ea typeface="Arial"/>
+              </a:rPr>
+              <a:t>[5]</a:t>
+            </a:r>
+          </a:p>
+        </p:txBody>
+      </p:sp>
+      <p:sp>
+        <p:nvSpPr>
+          <p:cNvPr id="16" name="TextBox 15"/>
+          <p:cNvSpPr txBox="1"/>
+          <p:nvPr/>
+        </p:nvSpPr>
+        <p:spPr>
+          <a:xfrm>
+            <a:off x="1234440" y="4453128"/>
+            <a:ext cx="10058400" cy="566928"/>
+          </a:xfrm>
+          <a:prstGeom prst="rect">
+            <a:avLst/>
+          </a:prstGeom>
+          <a:noFill/>
+        </p:spPr>
+        <p:txBody>
+          <a:bodyPr wrap="square" anchor="t" lIns="0" rIns="0" tIns="0" bIns="0">
+            <a:spAutoFit/>
+          </a:bodyPr>
+          <a:lstStyle/>
+          <a:p>
+            <a:pPr algn="l">
+              <a:lnSpc>
+                <a:spcPct val="135000"/>
+              </a:lnSpc>
+            </a:pPr>
+            <a:r>
+              <a:rPr sz="1050" b="0" i="0">
+                <a:solidFill>
+                  <a:srgbClr val="1B2430"/>
+                </a:solidFill>
+                <a:latin typeface="Arial"/>
+                <a:ea typeface="Arial"/>
+              </a:rPr>
+              <a:t>CSBA Blog (2026-04). Students express mixed feelings on AI use for homework. blog.csba.org</a:t>
+            </a:r>
+          </a:p>
+        </p:txBody>
+      </p:sp>
+      <p:sp>
+        <p:nvSpPr>
+          <p:cNvPr id="17" name="TextBox 16"/>
+          <p:cNvSpPr txBox="1"/>
+          <p:nvPr/>
+        </p:nvSpPr>
+        <p:spPr>
+          <a:xfrm>
+            <a:off x="777240" y="5074920"/>
+            <a:ext cx="457200" cy="274320"/>
+          </a:xfrm>
+          <a:prstGeom prst="rect">
+            <a:avLst/>
+          </a:prstGeom>
+          <a:noFill/>
+        </p:spPr>
+        <p:txBody>
+          <a:bodyPr wrap="square" anchor="t" lIns="0" rIns="0" tIns="0" bIns="0">
+            <a:spAutoFit/>
+          </a:bodyPr>
+          <a:lstStyle/>
+          <a:p>
+            <a:pPr algn="l">
+              <a:lnSpc>
+                <a:spcPct val="115000"/>
+              </a:lnSpc>
+            </a:pPr>
+            <a:r>
+              <a:rPr sz="1050" b="1" i="0">
+                <a:solidFill>
+                  <a:srgbClr val="3A6EA5"/>
+                </a:solidFill>
+                <a:latin typeface="Arial"/>
+                <a:ea typeface="Arial"/>
+              </a:rPr>
+              <a:t>[6]</a:t>
+            </a:r>
+          </a:p>
+        </p:txBody>
+      </p:sp>
+      <p:sp>
+        <p:nvSpPr>
+          <p:cNvPr id="18" name="TextBox 17"/>
+          <p:cNvSpPr txBox="1"/>
+          <p:nvPr/>
+        </p:nvSpPr>
+        <p:spPr>
+          <a:xfrm>
+            <a:off x="1234440" y="5074920"/>
+            <a:ext cx="10058400" cy="566928"/>
+          </a:xfrm>
+          <a:prstGeom prst="rect">
+            <a:avLst/>
+          </a:prstGeom>
+          <a:noFill/>
+        </p:spPr>
+        <p:txBody>
+          <a:bodyPr wrap="square" anchor="t" lIns="0" rIns="0" tIns="0" bIns="0">
+            <a:spAutoFit/>
+          </a:bodyPr>
+          <a:lstStyle/>
+          <a:p>
+            <a:pPr algn="l">
+              <a:lnSpc>
+                <a:spcPct val="135000"/>
+              </a:lnSpc>
+            </a:pPr>
+            <a:r>
+              <a:rPr sz="1050" b="0" i="0">
+                <a:solidFill>
+                  <a:srgbClr val="1B2430"/>
+                </a:solidFill>
+                <a:latin typeface="Arial"/>
+                <a:ea typeface="Arial"/>
+              </a:rPr>
+              <a:t>Central Florida Public Media (2026-06). Teacher poll: 54% say AI makes critical thinking harder.</a:t>
+            </a:r>
+          </a:p>
+        </p:txBody>
+      </p:sp>
+      <p:sp>
+        <p:nvSpPr>
+          <p:cNvPr id="19" name="TextBox 18"/>
+          <p:cNvSpPr txBox="1"/>
+          <p:nvPr/>
+        </p:nvSpPr>
+        <p:spPr>
+          <a:xfrm>
+            <a:off x="777240" y="5696712"/>
+            <a:ext cx="457200" cy="274320"/>
+          </a:xfrm>
+          <a:prstGeom prst="rect">
+            <a:avLst/>
+          </a:prstGeom>
+          <a:noFill/>
+        </p:spPr>
+        <p:txBody>
+          <a:bodyPr wrap="square" anchor="t" lIns="0" rIns="0" tIns="0" bIns="0">
+            <a:spAutoFit/>
+          </a:bodyPr>
+          <a:lstStyle/>
+          <a:p>
+            <a:pPr algn="l">
+              <a:lnSpc>
+                <a:spcPct val="115000"/>
+              </a:lnSpc>
+            </a:pPr>
+            <a:r>
+              <a:rPr sz="1050" b="1" i="0">
+                <a:solidFill>
+                  <a:srgbClr val="3A6EA5"/>
+                </a:solidFill>
+                <a:latin typeface="Arial"/>
+                <a:ea typeface="Arial"/>
+              </a:rPr>
+              <a:t>[7]</a:t>
+            </a:r>
+          </a:p>
+        </p:txBody>
+      </p:sp>
+      <p:sp>
+        <p:nvSpPr>
+          <p:cNvPr id="20" name="TextBox 19"/>
+          <p:cNvSpPr txBox="1"/>
+          <p:nvPr/>
+        </p:nvSpPr>
+        <p:spPr>
+          <a:xfrm>
+            <a:off x="1234440" y="5696712"/>
+            <a:ext cx="10058400" cy="566928"/>
+          </a:xfrm>
+          <a:prstGeom prst="rect">
+            <a:avLst/>
+          </a:prstGeom>
+          <a:noFill/>
+        </p:spPr>
+        <p:txBody>
+          <a:bodyPr wrap="square" anchor="t" lIns="0" rIns="0" tIns="0" bIns="0">
+            <a:spAutoFit/>
+          </a:bodyPr>
+          <a:lstStyle/>
+          <a:p>
+            <a:pPr algn="l">
+              <a:lnSpc>
+                <a:spcPct val="135000"/>
+              </a:lnSpc>
+            </a:pPr>
+            <a:r>
+              <a:rPr sz="1050" b="0" i="0">
+                <a:solidFill>
+                  <a:srgbClr val="1B2430"/>
+                </a:solidFill>
+                <a:latin typeface="Arial"/>
+                <a:ea typeface="Arial"/>
+              </a:rPr>
+              <a:t>RAND (2026-03). Student concern 54% → 67%; chatbot use 60% (ChatGPT 53%, Gemini 28%).</a:t>
+            </a:r>
+          </a:p>
+        </p:txBody>
+      </p:sp>
+      <p:sp>
+        <p:nvSpPr>
+          <p:cNvPr id="21" name="TextBox 20"/>
+          <p:cNvSpPr txBox="1"/>
+          <p:nvPr/>
+        </p:nvSpPr>
+        <p:spPr>
+          <a:xfrm>
+            <a:off x="777240" y="6291072"/>
+            <a:ext cx="10424160" cy="274320"/>
+          </a:xfrm>
+          <a:prstGeom prst="rect">
+            <a:avLst/>
+          </a:prstGeom>
+          <a:noFill/>
+        </p:spPr>
+        <p:txBody>
+          <a:bodyPr wrap="square" anchor="t" lIns="0" rIns="0" tIns="0" bIns="0">
+            <a:spAutoFit/>
+          </a:bodyPr>
+          <a:lstStyle/>
+          <a:p>
+            <a:pPr algn="l">
+              <a:lnSpc>
+                <a:spcPct val="115000"/>
+              </a:lnSpc>
+            </a:pPr>
+            <a:r>
+              <a:rPr sz="900" b="0" i="0">
+                <a:solidFill>
+                  <a:srgbClr val="6B7686"/>
+                </a:solidFill>
+                <a:latin typeface="Arial"/>
+                <a:ea typeface="Arial"/>
+              </a:rPr>
+              <a:t>Retrieved 2026-10-28. Figures as reported; definitions of “using AI” vary across surveys (16%–85%).</a:t>
+            </a:r>
+          </a:p>
+        </p:txBody>
+      </p:sp>
+    </p:spTree>
+  </p:cSld>
+  <p:clrMapOvr>
+    <a:masterClrMapping/>
+  </p:clrMapOvr>
+</p:sld>
+</file>
+
+<file path=ppt/slides/slide21.xml><?xml version="1.0" encoding="utf-8"?>
+<p:sld xmlns:a="http://schemas.openxmlformats.org/drawingml/2006/main" xmlns:p="http://schemas.openxmlformats.org/presentationml/2006/main" xmlns:r="http://schemas.openxmlformats.org/officeDocument/2006/relationships">
+  <p:cSld>
+    <p:spTree>
+      <p:nvGrpSpPr>
+        <p:cNvPr id="1" name=""/>
+        <p:cNvGrpSpPr/>
+        <p:nvPr/>
+      </p:nvGrpSpPr>
+      <p:grpSpPr/>
+      <p:sp>
+        <p:nvSpPr>
+          <p:cNvPr id="2" name="Rectangle 1"/>
+          <p:cNvSpPr/>
+          <p:nvPr/>
+        </p:nvSpPr>
+        <p:spPr>
+          <a:xfrm>
+            <a:off x="0" y="0"/>
+            <a:ext cx="12191695" cy="6858000"/>
+          </a:xfrm>
+          <a:prstGeom prst="rect">
+            <a:avLst/>
+          </a:prstGeom>
+          <a:solidFill>
+            <a:srgbClr val="1F2A44"/>
+          </a:solidFill>
+          <a:ln>
+            <a:noFill/>
+          </a:ln>
+          <a:effectLst/>
+        </p:spPr>
+        <p:style>
+          <a:lnRef idx="1">
+            <a:schemeClr val="accent1"/>
+          </a:lnRef>
+          <a:fillRef idx="3">
+            <a:schemeClr val="accent1"/>
+          </a:fillRef>
+          <a:effectRef idx="2">
+            <a:schemeClr val="accent1"/>
+          </a:effectRef>
+          <a:fontRef idx="minor">
+            <a:schemeClr val="lt1"/>
+          </a:fontRef>
+        </p:style>
+        <p:txBody>
+          <a:bodyPr rtlCol="0" anchor="ctr"/>
+          <a:lstStyle/>
+          <a:p>
+            <a:pPr algn="ctr"/>
+          </a:p>
+        </p:txBody>
+      </p:sp>
+      <p:sp>
+        <p:nvSpPr>
+          <p:cNvPr id="3" name="Rectangle 2"/>
+          <p:cNvSpPr/>
+          <p:nvPr/>
+        </p:nvSpPr>
+        <p:spPr>
+          <a:xfrm>
+            <a:off x="0" y="0"/>
+            <a:ext cx="182880" cy="6858000"/>
+          </a:xfrm>
+          <a:prstGeom prst="rect">
+            <a:avLst/>
+          </a:prstGeom>
+          <a:solidFill>
+            <a:srgbClr val="3A6EA5"/>
+          </a:solidFill>
+          <a:ln>
+            <a:noFill/>
+          </a:ln>
+          <a:effectLst/>
+        </p:spPr>
+        <p:style>
+          <a:lnRef idx="1">
+            <a:schemeClr val="accent1"/>
+          </a:lnRef>
+          <a:fillRef idx="3">
+            <a:schemeClr val="accent1"/>
+          </a:fillRef>
+          <a:effectRef idx="2">
+            <a:schemeClr val="accent1"/>
+          </a:effectRef>
+          <a:fontRef idx="minor">
+            <a:schemeClr val="lt1"/>
+          </a:fontRef>
+        </p:style>
+        <p:txBody>
+          <a:bodyPr rtlCol="0" anchor="ctr"/>
+          <a:lstStyle/>
+          <a:p>
+            <a:pPr algn="ctr"/>
+          </a:p>
+        </p:txBody>
+      </p:sp>
+      <p:sp>
+        <p:nvSpPr>
           <p:cNvPr id="4" name="TextBox 3"/>
           <p:cNvSpPr txBox="1"/>
           <p:nvPr/>
@@ -12936,7 +13763,7 @@
                 <a:latin typeface="Arial"/>
                 <a:ea typeface="Arial"/>
               </a:rPr>
-              <a:t>20</a:t>
+              <a:t>21</a:t>
             </a:r>
           </a:p>
         </p:txBody>
@@ -13401,6 +14228,46 @@
         </p:nvSpPr>
         <p:spPr>
           <a:xfrm>
+            <a:off x="777240" y="5577840"/>
+            <a:ext cx="10424160" cy="502920"/>
+          </a:xfrm>
+          <a:prstGeom prst="rect">
+            <a:avLst/>
+          </a:prstGeom>
+          <a:noFill/>
+        </p:spPr>
+        <p:txBody>
+          <a:bodyPr wrap="square" anchor="t" lIns="0" rIns="0" tIns="0" bIns="0">
+            <a:spAutoFit/>
+          </a:bodyPr>
+          <a:lstStyle/>
+          <a:p>
+            <a:pPr algn="l">
+              <a:lnSpc>
+                <a:spcPct val="130000"/>
+              </a:lnSpc>
+            </a:pPr>
+            <a:r>
+              <a:rPr sz="1150" b="0" i="0">
+                <a:solidFill>
+                  <a:srgbClr val="6B7686"/>
+                </a:solidFill>
+                <a:latin typeface="Arial"/>
+                <a:ea typeface="Arial"/>
+              </a:rPr>
+              <a:t>How to read: among 1,214 youth aged 12–29, AI-for-homework use rose from 48% to 62% in seven months.</a:t>
+            </a:r>
+          </a:p>
+        </p:txBody>
+      </p:sp>
+      <p:sp>
+        <p:nvSpPr>
+          <p:cNvPr id="14" name="TextBox 13"/>
+          <p:cNvSpPr txBox="1"/>
+          <p:nvPr/>
+        </p:nvSpPr>
+        <p:spPr>
+          <a:xfrm>
             <a:off x="777240" y="6419088"/>
             <a:ext cx="10241280" cy="274320"/>
           </a:xfrm>
@@ -13428,7 +14295,7 @@
                 <a:latin typeface="Arial"/>
                 <a:ea typeface="Arial"/>
               </a:rPr>
-              <a:t>Sources: RAND (2026-03, n=1,214), HEPI (2025-02), Common Sense Media (2025)</a:t>
+              <a:t>RAND, “More Students Use AI for Homework…” (2026-03-17, n=1,214) · HEPI, Student Generative AI Survey (2025-02) · Common Sense Media (2025)</a:t>
             </a:r>
           </a:p>
         </p:txBody>
@@ -13788,6 +14655,46 @@
         </p:nvSpPr>
         <p:spPr>
           <a:xfrm>
+            <a:off x="777240" y="5212079"/>
+            <a:ext cx="10424160" cy="502920"/>
+          </a:xfrm>
+          <a:prstGeom prst="rect">
+            <a:avLst/>
+          </a:prstGeom>
+          <a:noFill/>
+        </p:spPr>
+        <p:txBody>
+          <a:bodyPr wrap="square" anchor="t" lIns="0" rIns="0" tIns="0" bIns="0">
+            <a:spAutoFit/>
+          </a:bodyPr>
+          <a:lstStyle/>
+          <a:p>
+            <a:pPr algn="l">
+              <a:lnSpc>
+                <a:spcPct val="130000"/>
+              </a:lnSpc>
+            </a:pPr>
+            <a:r>
+              <a:rPr sz="1150" b="0" i="0">
+                <a:solidFill>
+                  <a:srgbClr val="6B7686"/>
+                </a:solidFill>
+                <a:latin typeface="Arial"/>
+                <a:ea typeface="Arial"/>
+              </a:rPr>
+              <a:t>How to read: the top three uses all mean “let AI produce something”, not “let AI check my judgement”.</a:t>
+            </a:r>
+          </a:p>
+        </p:txBody>
+      </p:sp>
+      <p:sp>
+        <p:nvSpPr>
+          <p:cNvPr id="11" name="TextBox 10"/>
+          <p:cNvSpPr txBox="1"/>
+          <p:nvPr/>
+        </p:nvSpPr>
+        <p:spPr>
+          <a:xfrm>
             <a:off x="777240" y="6419088"/>
             <a:ext cx="10241280" cy="274320"/>
           </a:xfrm>
@@ -13815,7 +14722,7 @@
                 <a:latin typeface="Arial"/>
                 <a:ea typeface="Arial"/>
               </a:rPr>
-              <a:t>Source: CSBA Blog citing a 2026 student survey</a:t>
+              <a:t>RAND (2026-03-17). Uses: explanations 38%, brainstorming 35%, fact lookup 33%.</a:t>
             </a:r>
           </a:p>
         </p:txBody>
@@ -13957,7 +14864,7 @@
                 <a:latin typeface="Arial"/>
                 <a:ea typeface="Arial"/>
               </a:rPr>
-              <a:t>Teachers worry: do students still think?</a:t>
+              <a:t>Concern is rising on both sides</a:t>
             </a:r>
           </a:p>
         </p:txBody>
@@ -14173,7 +15080,7 @@
                 <a:latin typeface="Arial"/>
                 <a:ea typeface="Arial"/>
               </a:rPr>
-              <a:t>54%</a:t>
+              <a:t>67%</a:t>
             </a:r>
           </a:p>
         </p:txBody>
@@ -14213,7 +15120,24 @@
                 <a:latin typeface="Arial"/>
                 <a:ea typeface="Arial"/>
               </a:rPr>
-              <a:t>say AI makes critical thinking harder</a:t>
+              <a:t>of students worry AI harms critical thinking</a:t>
+            </a:r>
+          </a:p>
+          <a:p>
+            <a:pPr algn="l">
+              <a:lnSpc>
+                <a:spcPct val="130000"/>
+              </a:lnSpc>
+            </a:pPr>
+            <a:r>
+              <a:rPr sz="1250" b="0" i="0">
+                <a:solidFill>
+                  <a:srgbClr val="1B2430"/>
+                </a:solidFill>
+                <a:latin typeface="Arial"/>
+                <a:ea typeface="Arial"/>
+              </a:rPr>
+              <a:t>(54% earlier in 2025)</a:t>
             </a:r>
           </a:p>
         </p:txBody>
@@ -14385,7 +15309,24 @@
                 <a:latin typeface="Arial"/>
                 <a:ea typeface="Arial"/>
               </a:rPr>
-              <a:t>worried about student AI use</a:t>
+              <a:t>of teachers worried about student AI use</a:t>
+            </a:r>
+          </a:p>
+          <a:p>
+            <a:pPr algn="l">
+              <a:lnSpc>
+                <a:spcPct val="130000"/>
+              </a:lnSpc>
+            </a:pPr>
+            <a:r>
+              <a:rPr sz="1250" b="0" i="0">
+                <a:solidFill>
+                  <a:srgbClr val="1B2430"/>
+                </a:solidFill>
+                <a:latin typeface="Arial"/>
+                <a:ea typeface="Arial"/>
+              </a:rPr>
+              <a:t>(+7.5 pp year on year)</a:t>
             </a:r>
           </a:p>
         </p:txBody>
@@ -14517,7 +15458,7 @@
                 <a:latin typeface="Arial"/>
                 <a:ea typeface="Arial"/>
               </a:rPr>
-              <a:t>66%</a:t>
+              <a:t>54%</a:t>
             </a:r>
           </a:p>
         </p:txBody>
@@ -14557,7 +15498,24 @@
                 <a:latin typeface="Arial"/>
                 <a:ea typeface="Arial"/>
               </a:rPr>
-              <a:t>of England secondary teachers concerned</a:t>
+              <a:t>of teachers say AI makes thinking harder</a:t>
+            </a:r>
+          </a:p>
+          <a:p>
+            <a:pPr algn="l">
+              <a:lnSpc>
+                <a:spcPct val="130000"/>
+              </a:lnSpc>
+            </a:pPr>
+            <a:r>
+              <a:rPr sz="1250" b="0" i="0">
+                <a:solidFill>
+                  <a:srgbClr val="1B2430"/>
+                </a:solidFill>
+                <a:latin typeface="Arial"/>
+                <a:ea typeface="Arial"/>
+              </a:rPr>
+              <a:t>(2026 teacher poll)</a:t>
             </a:r>
           </a:p>
         </p:txBody>
@@ -14565,6 +15523,46 @@
       <p:sp>
         <p:nvSpPr>
           <p:cNvPr id="19" name="TextBox 18"/>
+          <p:cNvSpPr txBox="1"/>
+          <p:nvPr/>
+        </p:nvSpPr>
+        <p:spPr>
+          <a:xfrm>
+            <a:off x="777240" y="4572000"/>
+            <a:ext cx="10424160" cy="502920"/>
+          </a:xfrm>
+          <a:prstGeom prst="rect">
+            <a:avLst/>
+          </a:prstGeom>
+          <a:noFill/>
+        </p:spPr>
+        <p:txBody>
+          <a:bodyPr wrap="square" anchor="t" lIns="0" rIns="0" tIns="0" bIns="0">
+            <a:spAutoFit/>
+          </a:bodyPr>
+          <a:lstStyle/>
+          <a:p>
+            <a:pPr algn="l">
+              <a:lnSpc>
+                <a:spcPct val="130000"/>
+              </a:lnSpc>
+            </a:pPr>
+            <a:r>
+              <a:rPr sz="1150" b="0" i="0">
+                <a:solidFill>
+                  <a:srgbClr val="6B7686"/>
+                </a:solidFill>
+                <a:latin typeface="Arial"/>
+                <a:ea typeface="Arial"/>
+              </a:rPr>
+              <a:t>How to read: three independent surveys point the same way — concern is rising among students and teachers.</a:t>
+            </a:r>
+          </a:p>
+        </p:txBody>
+      </p:sp>
+      <p:sp>
+        <p:nvSpPr>
+          <p:cNvPr id="20" name="TextBox 19"/>
           <p:cNvSpPr txBox="1"/>
           <p:nvPr/>
         </p:nvSpPr>
@@ -14597,7 +15595,7 @@
                 <a:latin typeface="Arial"/>
                 <a:ea typeface="Arial"/>
               </a:rPr>
-              <a:t>Sources: teacher poll (2026-06), National Literacy Trust (2025-08), England survey (2026)</a:t>
+              <a:t>RAND (2026-03) · National Literacy Trust (2025-08) · teacher poll reported by Central Florida Public Media (2026-06)</a:t>
             </a:r>
           </a:p>
         </p:txBody>
@@ -17353,6 +18351,46 @@
       <p:sp>
         <p:nvSpPr>
           <p:cNvPr id="20" name="TextBox 19"/>
+          <p:cNvSpPr txBox="1"/>
+          <p:nvPr/>
+        </p:nvSpPr>
+        <p:spPr>
+          <a:xfrm>
+            <a:off x="7635240" y="2286000"/>
+            <a:ext cx="3840480" cy="1371600"/>
+          </a:xfrm>
+          <a:prstGeom prst="rect">
+            <a:avLst/>
+          </a:prstGeom>
+          <a:noFill/>
+        </p:spPr>
+        <p:txBody>
+          <a:bodyPr wrap="square" anchor="t" lIns="0" rIns="0" tIns="0" bIns="0">
+            <a:spAutoFit/>
+          </a:bodyPr>
+          <a:lstStyle/>
+          <a:p>
+            <a:pPr algn="l">
+              <a:lnSpc>
+                <a:spcPct val="135000"/>
+              </a:lnSpc>
+            </a:pPr>
+            <a:r>
+              <a:rPr sz="1100" b="0" i="0">
+                <a:solidFill>
+                  <a:srgbClr val="6B7686"/>
+                </a:solidFill>
+                <a:latin typeface="Arial"/>
+                <a:ea typeface="Arial"/>
+              </a:rPr>
+              <a:t>How to read: x = the AI's role, y = the subject. Existing work sits on the left; we work in the bottom-right.</a:t>
+            </a:r>
+          </a:p>
+        </p:txBody>
+      </p:sp>
+      <p:sp>
+        <p:nvSpPr>
+          <p:cNvPr id="21" name="TextBox 20"/>
           <p:cNvSpPr txBox="1"/>
           <p:nvPr/>
         </p:nvSpPr>
